--- a/docs/newProjectTemplate.pptx
+++ b/docs/newProjectTemplate.pptx
@@ -5693,6 +5693,277 @@
           <a:chExt cx="0" cy="0"/>
         </a:xfrm>
       </p:grpSpPr>
+      <p:pic>
+        <p:nvPicPr>
+          <p:cNvPr id="3" name="그림 2">
+            <a:extLst>
+              <a:ext uri="{FF2B5EF4-FFF2-40B4-BE49-F238E27FC236}">
+                <a16:creationId xmlns:a16="http://schemas.microsoft.com/office/drawing/2014/main" id="{BDAA64DE-31B0-7D1C-E1BB-B7752FDCAC47}"/>
+              </a:ext>
+            </a:extLst>
+          </p:cNvPr>
+          <p:cNvPicPr>
+            <a:picLocks noChangeAspect="1"/>
+          </p:cNvPicPr>
+          <p:nvPr/>
+        </p:nvPicPr>
+        <p:blipFill>
+          <a:blip r:embed="rId2"/>
+          <a:stretch>
+            <a:fillRect/>
+          </a:stretch>
+        </p:blipFill>
+        <p:spPr>
+          <a:xfrm>
+            <a:off x="2061373" y="607197"/>
+            <a:ext cx="647733" cy="635033"/>
+          </a:xfrm>
+          <a:prstGeom prst="rect">
+            <a:avLst/>
+          </a:prstGeom>
+        </p:spPr>
+      </p:pic>
+      <p:pic>
+        <p:nvPicPr>
+          <p:cNvPr id="5" name="그림 4">
+            <a:extLst>
+              <a:ext uri="{FF2B5EF4-FFF2-40B4-BE49-F238E27FC236}">
+                <a16:creationId xmlns:a16="http://schemas.microsoft.com/office/drawing/2014/main" id="{6E878580-D16B-DFBB-403C-0BBC10BA6936}"/>
+              </a:ext>
+            </a:extLst>
+          </p:cNvPr>
+          <p:cNvPicPr>
+            <a:picLocks noChangeAspect="1"/>
+          </p:cNvPicPr>
+          <p:nvPr/>
+        </p:nvPicPr>
+        <p:blipFill>
+          <a:blip r:embed="rId3"/>
+          <a:stretch>
+            <a:fillRect/>
+          </a:stretch>
+        </p:blipFill>
+        <p:spPr>
+          <a:xfrm>
+            <a:off x="2869055" y="740553"/>
+            <a:ext cx="1073205" cy="368319"/>
+          </a:xfrm>
+          <a:prstGeom prst="rect">
+            <a:avLst/>
+          </a:prstGeom>
+        </p:spPr>
+      </p:pic>
+      <p:sp>
+        <p:nvSpPr>
+          <p:cNvPr id="8" name="화살표: 갈매기형 수장 7">
+            <a:extLst>
+              <a:ext uri="{FF2B5EF4-FFF2-40B4-BE49-F238E27FC236}">
+                <a16:creationId xmlns:a16="http://schemas.microsoft.com/office/drawing/2014/main" id="{45A57C57-7B7A-0BD9-DCAB-52BAD239A119}"/>
+              </a:ext>
+            </a:extLst>
+          </p:cNvPr>
+          <p:cNvSpPr/>
+          <p:nvPr/>
+        </p:nvSpPr>
+        <p:spPr>
+          <a:xfrm>
+            <a:off x="10738853" y="675915"/>
+            <a:ext cx="167685" cy="141088"/>
+          </a:xfrm>
+          <a:prstGeom prst="chevron">
+            <a:avLst/>
+          </a:prstGeom>
+        </p:spPr>
+        <p:style>
+          <a:lnRef idx="2">
+            <a:schemeClr val="accent1">
+              <a:shade val="15000"/>
+            </a:schemeClr>
+          </a:lnRef>
+          <a:fillRef idx="1">
+            <a:schemeClr val="accent1"/>
+          </a:fillRef>
+          <a:effectRef idx="0">
+            <a:schemeClr val="accent1"/>
+          </a:effectRef>
+          <a:fontRef idx="minor">
+            <a:schemeClr val="lt1"/>
+          </a:fontRef>
+        </p:style>
+        <p:txBody>
+          <a:bodyPr rtlCol="0" anchor="ctr"/>
+          <a:lstStyle/>
+          <a:p>
+            <a:pPr algn="ctr"/>
+            <a:endParaRPr lang="ko-KR" altLang="en-US">
+              <a:solidFill>
+                <a:schemeClr val="tx1"/>
+              </a:solidFill>
+            </a:endParaRPr>
+          </a:p>
+        </p:txBody>
+      </p:sp>
+      <p:sp>
+        <p:nvSpPr>
+          <p:cNvPr id="9" name="TextBox 8">
+            <a:extLst>
+              <a:ext uri="{FF2B5EF4-FFF2-40B4-BE49-F238E27FC236}">
+                <a16:creationId xmlns:a16="http://schemas.microsoft.com/office/drawing/2014/main" id="{3738CBF8-2132-C149-08D5-99A80DBA3267}"/>
+              </a:ext>
+            </a:extLst>
+          </p:cNvPr>
+          <p:cNvSpPr txBox="1"/>
+          <p:nvPr/>
+        </p:nvSpPr>
+        <p:spPr>
+          <a:xfrm>
+            <a:off x="9415414" y="592571"/>
+            <a:ext cx="1323439" cy="307777"/>
+          </a:xfrm>
+          <a:prstGeom prst="rect">
+            <a:avLst/>
+          </a:prstGeom>
+          <a:noFill/>
+        </p:spPr>
+        <p:txBody>
+          <a:bodyPr wrap="none" rtlCol="0">
+            <a:spAutoFit/>
+          </a:bodyPr>
+          <a:lstStyle/>
+          <a:p>
+            <a:r>
+              <a:rPr lang="en-US" altLang="ko-KR" sz="1400" b="1">
+                <a:solidFill>
+                  <a:schemeClr val="bg2">
+                    <a:lumMod val="25000"/>
+                  </a:schemeClr>
+                </a:solidFill>
+                <a:latin typeface="함초롬돋움" panose="020B0604000101010101" pitchFamily="50" charset="-127"/>
+                <a:ea typeface="함초롬돋움" panose="020B0604000101010101" pitchFamily="50" charset="-127"/>
+                <a:cs typeface="함초롬돋움" panose="020B0604000101010101" pitchFamily="50" charset="-127"/>
+              </a:rPr>
+              <a:t>UI TOOL </a:t>
+            </a:r>
+            <a:r>
+              <a:rPr lang="ko-KR" altLang="en-US" sz="1400" b="1">
+                <a:solidFill>
+                  <a:schemeClr val="bg2">
+                    <a:lumMod val="25000"/>
+                  </a:schemeClr>
+                </a:solidFill>
+                <a:latin typeface="함초롬돋움" panose="020B0604000101010101" pitchFamily="50" charset="-127"/>
+                <a:ea typeface="함초롬돋움" panose="020B0604000101010101" pitchFamily="50" charset="-127"/>
+                <a:cs typeface="함초롬돋움" panose="020B0604000101010101" pitchFamily="50" charset="-127"/>
+              </a:rPr>
+              <a:t>소개</a:t>
+            </a:r>
+          </a:p>
+        </p:txBody>
+      </p:sp>
+      <p:sp>
+        <p:nvSpPr>
+          <p:cNvPr id="10" name="TextBox 9">
+            <a:extLst>
+              <a:ext uri="{FF2B5EF4-FFF2-40B4-BE49-F238E27FC236}">
+                <a16:creationId xmlns:a16="http://schemas.microsoft.com/office/drawing/2014/main" id="{1D3B10D1-BDD5-19D9-9113-4F34ECD2066C}"/>
+              </a:ext>
+            </a:extLst>
+          </p:cNvPr>
+          <p:cNvSpPr txBox="1"/>
+          <p:nvPr/>
+        </p:nvSpPr>
+        <p:spPr>
+          <a:xfrm>
+            <a:off x="11073159" y="607197"/>
+            <a:ext cx="938077" cy="307777"/>
+          </a:xfrm>
+          <a:prstGeom prst="rect">
+            <a:avLst/>
+          </a:prstGeom>
+          <a:noFill/>
+        </p:spPr>
+        <p:txBody>
+          <a:bodyPr wrap="none" rtlCol="0">
+            <a:spAutoFit/>
+          </a:bodyPr>
+          <a:lstStyle/>
+          <a:p>
+            <a:r>
+              <a:rPr lang="ko-KR" altLang="en-US" sz="1400" b="1">
+                <a:solidFill>
+                  <a:schemeClr val="bg2">
+                    <a:lumMod val="25000"/>
+                  </a:schemeClr>
+                </a:solidFill>
+                <a:latin typeface="함초롬돋움" panose="020B0604000101010101" pitchFamily="50" charset="-127"/>
+                <a:ea typeface="함초롬돋움" panose="020B0604000101010101" pitchFamily="50" charset="-127"/>
+                <a:cs typeface="함초롬돋움" panose="020B0604000101010101" pitchFamily="50" charset="-127"/>
+              </a:rPr>
+              <a:t>도구 소개</a:t>
+            </a:r>
+          </a:p>
+        </p:txBody>
+      </p:sp>
+      <p:pic>
+        <p:nvPicPr>
+          <p:cNvPr id="12" name="그림 11">
+            <a:extLst>
+              <a:ext uri="{FF2B5EF4-FFF2-40B4-BE49-F238E27FC236}">
+                <a16:creationId xmlns:a16="http://schemas.microsoft.com/office/drawing/2014/main" id="{4CF1AADC-924C-D9CE-8F5D-DC27D8652D89}"/>
+              </a:ext>
+            </a:extLst>
+          </p:cNvPr>
+          <p:cNvPicPr>
+            <a:picLocks noChangeAspect="1"/>
+          </p:cNvPicPr>
+          <p:nvPr/>
+        </p:nvPicPr>
+        <p:blipFill>
+          <a:blip r:embed="rId4"/>
+          <a:stretch>
+            <a:fillRect/>
+          </a:stretch>
+        </p:blipFill>
+        <p:spPr>
+          <a:xfrm>
+            <a:off x="0" y="3167"/>
+            <a:ext cx="12192000" cy="543073"/>
+          </a:xfrm>
+          <a:prstGeom prst="rect">
+            <a:avLst/>
+          </a:prstGeom>
+        </p:spPr>
+      </p:pic>
+      <p:pic>
+        <p:nvPicPr>
+          <p:cNvPr id="14" name="그림 13">
+            <a:extLst>
+              <a:ext uri="{FF2B5EF4-FFF2-40B4-BE49-F238E27FC236}">
+                <a16:creationId xmlns:a16="http://schemas.microsoft.com/office/drawing/2014/main" id="{1F1EB6CB-B05C-C2DC-509C-74F7B9952A5E}"/>
+              </a:ext>
+            </a:extLst>
+          </p:cNvPr>
+          <p:cNvPicPr>
+            <a:picLocks noChangeAspect="1"/>
+          </p:cNvPicPr>
+          <p:nvPr/>
+        </p:nvPicPr>
+        <p:blipFill>
+          <a:blip r:embed="rId5"/>
+          <a:stretch>
+            <a:fillRect/>
+          </a:stretch>
+        </p:blipFill>
+        <p:spPr>
+          <a:xfrm>
+            <a:off x="-13252" y="466728"/>
+            <a:ext cx="1985595" cy="4569099"/>
+          </a:xfrm>
+          <a:prstGeom prst="rect">
+            <a:avLst/>
+          </a:prstGeom>
+        </p:spPr>
+      </p:pic>
     </p:spTree>
     <p:extLst>
       <p:ext uri="{BB962C8B-B14F-4D97-AF65-F5344CB8AC3E}">
